--- a/Презентация к инд.заданию, семестр 2 (Антипин, Дмитрий, группа ит-8).pptx
+++ b/Презентация к инд.заданию, семестр 2 (Антипин, Дмитрий, группа ит-8).pptx
@@ -5,7 +5,7 @@
     <p:sldMasterId id="2147483648" r:id="rId1"/>
   </p:sldMasterIdLst>
   <p:notesMasterIdLst>
-    <p:notesMasterId r:id="rId14"/>
+    <p:notesMasterId r:id="rId15"/>
   </p:notesMasterIdLst>
   <p:sldIdLst>
     <p:sldId id="269" r:id="rId2"/>
@@ -13,13 +13,14 @@
     <p:sldId id="258" r:id="rId4"/>
     <p:sldId id="266" r:id="rId5"/>
     <p:sldId id="260" r:id="rId6"/>
-    <p:sldId id="267" r:id="rId7"/>
-    <p:sldId id="268" r:id="rId8"/>
-    <p:sldId id="270" r:id="rId9"/>
-    <p:sldId id="271" r:id="rId10"/>
-    <p:sldId id="263" r:id="rId11"/>
-    <p:sldId id="272" r:id="rId12"/>
-    <p:sldId id="264" r:id="rId13"/>
+    <p:sldId id="273" r:id="rId7"/>
+    <p:sldId id="267" r:id="rId8"/>
+    <p:sldId id="268" r:id="rId9"/>
+    <p:sldId id="270" r:id="rId10"/>
+    <p:sldId id="271" r:id="rId11"/>
+    <p:sldId id="263" r:id="rId12"/>
+    <p:sldId id="272" r:id="rId13"/>
+    <p:sldId id="264" r:id="rId14"/>
   </p:sldIdLst>
   <p:sldSz cx="12192000" cy="6858000"/>
   <p:notesSz cx="6858000" cy="9144000"/>
@@ -118,7 +119,278 @@
       </a:defRPr>
     </a:lvl9pPr>
   </p:defaultTextStyle>
+  <p:extLst>
+    <p:ext uri="{EFAFB233-063F-42B5-8137-9DF3F51BA10A}">
+      <p15:sldGuideLst xmlns:p15="http://schemas.microsoft.com/office/powerpoint/2012/main"/>
+    </p:ext>
+  </p:extLst>
 </p:presentation>
+</file>
+
+<file path=ppt/revisionInfo.xml><?xml version="1.0" encoding="utf-8"?>
+<p1510:revInfo xmlns:a="http://schemas.openxmlformats.org/drawingml/2006/main" xmlns:r="http://schemas.openxmlformats.org/officeDocument/2006/relationships" xmlns:p1510="http://schemas.microsoft.com/office/powerpoint/2015/10/main">
+  <p1510:revLst>
+    <p1510:client id="{48C118C6-7036-4C7F-BA2D-46EAD9BBA135}" v="2" dt="2026-06-22T05:47:10.734"/>
+  </p1510:revLst>
+</p1510:revInfo>
+</file>
+
+<file path=ppt/changesInfos/changesInfo1.xml><?xml version="1.0" encoding="utf-8"?>
+<pc:chgInfo xmlns:a="http://schemas.openxmlformats.org/drawingml/2006/main" xmlns:r="http://schemas.openxmlformats.org/officeDocument/2006/relationships" xmlns:ac="http://schemas.microsoft.com/office/drawing/2013/main/command" xmlns:pc="http://schemas.microsoft.com/office/powerpoint/2013/main/command">
+  <pc:docChgLst>
+    <pc:chgData name="Stalin Iosif" userId="f6dc6f5d266124aa" providerId="LiveId" clId="{48C118C6-7036-4C7F-BA2D-46EAD9BBA135}"/>
+    <pc:docChg chg="undo custSel addSld modSld">
+      <pc:chgData name="Stalin Iosif" userId="f6dc6f5d266124aa" providerId="LiveId" clId="{48C118C6-7036-4C7F-BA2D-46EAD9BBA135}" dt="2026-06-22T14:35:26.764" v="536" actId="20577"/>
+      <pc:docMkLst>
+        <pc:docMk/>
+      </pc:docMkLst>
+      <pc:sldChg chg="modSp mod">
+        <pc:chgData name="Stalin Iosif" userId="f6dc6f5d266124aa" providerId="LiveId" clId="{48C118C6-7036-4C7F-BA2D-46EAD9BBA135}" dt="2026-06-22T05:26:53.932" v="248" actId="255"/>
+        <pc:sldMkLst>
+          <pc:docMk/>
+          <pc:sldMk cId="0" sldId="257"/>
+        </pc:sldMkLst>
+        <pc:spChg chg="mod">
+          <ac:chgData name="Stalin Iosif" userId="f6dc6f5d266124aa" providerId="LiveId" clId="{48C118C6-7036-4C7F-BA2D-46EAD9BBA135}" dt="2026-06-22T05:26:53.932" v="248" actId="255"/>
+          <ac:spMkLst>
+            <pc:docMk/>
+            <pc:sldMk cId="0" sldId="257"/>
+            <ac:spMk id="2" creationId="{84AB84DD-9FA2-BC09-B91A-0C85E8843370}"/>
+          </ac:spMkLst>
+        </pc:spChg>
+      </pc:sldChg>
+      <pc:sldChg chg="modSp mod">
+        <pc:chgData name="Stalin Iosif" userId="f6dc6f5d266124aa" providerId="LiveId" clId="{48C118C6-7036-4C7F-BA2D-46EAD9BBA135}" dt="2026-06-22T05:26:44.168" v="247" actId="27636"/>
+        <pc:sldMkLst>
+          <pc:docMk/>
+          <pc:sldMk cId="0" sldId="258"/>
+        </pc:sldMkLst>
+        <pc:spChg chg="mod">
+          <ac:chgData name="Stalin Iosif" userId="f6dc6f5d266124aa" providerId="LiveId" clId="{48C118C6-7036-4C7F-BA2D-46EAD9BBA135}" dt="2026-06-22T05:26:44.168" v="247" actId="27636"/>
+          <ac:spMkLst>
+            <pc:docMk/>
+            <pc:sldMk cId="0" sldId="258"/>
+            <ac:spMk id="2" creationId="{A52A6A7C-A76F-CBBE-5929-104EDB23AE88}"/>
+          </ac:spMkLst>
+        </pc:spChg>
+      </pc:sldChg>
+      <pc:sldChg chg="modSp mod">
+        <pc:chgData name="Stalin Iosif" userId="f6dc6f5d266124aa" providerId="LiveId" clId="{48C118C6-7036-4C7F-BA2D-46EAD9BBA135}" dt="2026-06-22T05:29:23.865" v="350" actId="255"/>
+        <pc:sldMkLst>
+          <pc:docMk/>
+          <pc:sldMk cId="0" sldId="260"/>
+        </pc:sldMkLst>
+        <pc:spChg chg="mod">
+          <ac:chgData name="Stalin Iosif" userId="f6dc6f5d266124aa" providerId="LiveId" clId="{48C118C6-7036-4C7F-BA2D-46EAD9BBA135}" dt="2026-06-22T05:29:23.865" v="350" actId="255"/>
+          <ac:spMkLst>
+            <pc:docMk/>
+            <pc:sldMk cId="0" sldId="260"/>
+            <ac:spMk id="2" creationId="{669AFF2E-6B63-1322-93D1-8F5EA0160894}"/>
+          </ac:spMkLst>
+        </pc:spChg>
+      </pc:sldChg>
+      <pc:sldChg chg="modSp mod">
+        <pc:chgData name="Stalin Iosif" userId="f6dc6f5d266124aa" providerId="LiveId" clId="{48C118C6-7036-4C7F-BA2D-46EAD9BBA135}" dt="2026-06-22T05:03:14.874" v="91"/>
+        <pc:sldMkLst>
+          <pc:docMk/>
+          <pc:sldMk cId="0" sldId="263"/>
+        </pc:sldMkLst>
+        <pc:spChg chg="mod">
+          <ac:chgData name="Stalin Iosif" userId="f6dc6f5d266124aa" providerId="LiveId" clId="{48C118C6-7036-4C7F-BA2D-46EAD9BBA135}" dt="2026-06-22T05:03:14.874" v="91"/>
+          <ac:spMkLst>
+            <pc:docMk/>
+            <pc:sldMk cId="0" sldId="263"/>
+            <ac:spMk id="2" creationId="{D3D10755-22C4-628F-C01C-C0004ED2409E}"/>
+          </ac:spMkLst>
+        </pc:spChg>
+      </pc:sldChg>
+      <pc:sldChg chg="modSp mod">
+        <pc:chgData name="Stalin Iosif" userId="f6dc6f5d266124aa" providerId="LiveId" clId="{48C118C6-7036-4C7F-BA2D-46EAD9BBA135}" dt="2026-06-22T14:35:26.764" v="536" actId="20577"/>
+        <pc:sldMkLst>
+          <pc:docMk/>
+          <pc:sldMk cId="0" sldId="264"/>
+        </pc:sldMkLst>
+        <pc:spChg chg="mod">
+          <ac:chgData name="Stalin Iosif" userId="f6dc6f5d266124aa" providerId="LiveId" clId="{48C118C6-7036-4C7F-BA2D-46EAD9BBA135}" dt="2026-06-22T14:35:26.764" v="536" actId="20577"/>
+          <ac:spMkLst>
+            <pc:docMk/>
+            <pc:sldMk cId="0" sldId="264"/>
+            <ac:spMk id="2" creationId="{D345124E-4920-73B2-04B9-F3358E601ECF}"/>
+          </ac:spMkLst>
+        </pc:spChg>
+      </pc:sldChg>
+      <pc:sldChg chg="addSp delSp modSp mod">
+        <pc:chgData name="Stalin Iosif" userId="f6dc6f5d266124aa" providerId="LiveId" clId="{48C118C6-7036-4C7F-BA2D-46EAD9BBA135}" dt="2026-06-22T05:37:52.374" v="439" actId="20577"/>
+        <pc:sldMkLst>
+          <pc:docMk/>
+          <pc:sldMk cId="0" sldId="266"/>
+        </pc:sldMkLst>
+        <pc:spChg chg="mod">
+          <ac:chgData name="Stalin Iosif" userId="f6dc6f5d266124aa" providerId="LiveId" clId="{48C118C6-7036-4C7F-BA2D-46EAD9BBA135}" dt="2026-06-22T05:37:52.374" v="439" actId="20577"/>
+          <ac:spMkLst>
+            <pc:docMk/>
+            <pc:sldMk cId="0" sldId="266"/>
+            <ac:spMk id="3" creationId="{01C22B86-7FAD-7CFA-C1F2-0DFE318D95B9}"/>
+          </ac:spMkLst>
+        </pc:spChg>
+        <pc:picChg chg="add del mod">
+          <ac:chgData name="Stalin Iosif" userId="f6dc6f5d266124aa" providerId="LiveId" clId="{48C118C6-7036-4C7F-BA2D-46EAD9BBA135}" dt="2026-06-22T05:37:18.326" v="417" actId="21"/>
+          <ac:picMkLst>
+            <pc:docMk/>
+            <pc:sldMk cId="0" sldId="266"/>
+            <ac:picMk id="5" creationId="{C5B3A5A8-5878-58AA-4EAC-32B18C08E6A9}"/>
+          </ac:picMkLst>
+        </pc:picChg>
+        <pc:picChg chg="add mod">
+          <ac:chgData name="Stalin Iosif" userId="f6dc6f5d266124aa" providerId="LiveId" clId="{48C118C6-7036-4C7F-BA2D-46EAD9BBA135}" dt="2026-06-22T05:37:36.616" v="420" actId="14100"/>
+          <ac:picMkLst>
+            <pc:docMk/>
+            <pc:sldMk cId="0" sldId="266"/>
+            <ac:picMk id="7" creationId="{8AF94698-1B95-4C98-4193-D86183575AFA}"/>
+          </ac:picMkLst>
+        </pc:picChg>
+      </pc:sldChg>
+      <pc:sldChg chg="modSp mod">
+        <pc:chgData name="Stalin Iosif" userId="f6dc6f5d266124aa" providerId="LiveId" clId="{48C118C6-7036-4C7F-BA2D-46EAD9BBA135}" dt="2026-06-22T05:02:07.822" v="40" actId="20577"/>
+        <pc:sldMkLst>
+          <pc:docMk/>
+          <pc:sldMk cId="0" sldId="268"/>
+        </pc:sldMkLst>
+        <pc:spChg chg="mod">
+          <ac:chgData name="Stalin Iosif" userId="f6dc6f5d266124aa" providerId="LiveId" clId="{48C118C6-7036-4C7F-BA2D-46EAD9BBA135}" dt="2026-06-22T05:02:07.822" v="40" actId="20577"/>
+          <ac:spMkLst>
+            <pc:docMk/>
+            <pc:sldMk cId="0" sldId="268"/>
+            <ac:spMk id="2" creationId="{97991D10-0397-C721-414F-4BFA85165068}"/>
+          </ac:spMkLst>
+        </pc:spChg>
+      </pc:sldChg>
+      <pc:sldChg chg="modSp mod">
+        <pc:chgData name="Stalin Iosif" userId="f6dc6f5d266124aa" providerId="LiveId" clId="{48C118C6-7036-4C7F-BA2D-46EAD9BBA135}" dt="2026-06-22T05:38:05.655" v="441" actId="207"/>
+        <pc:sldMkLst>
+          <pc:docMk/>
+          <pc:sldMk cId="0" sldId="269"/>
+        </pc:sldMkLst>
+        <pc:spChg chg="mod">
+          <ac:chgData name="Stalin Iosif" userId="f6dc6f5d266124aa" providerId="LiveId" clId="{48C118C6-7036-4C7F-BA2D-46EAD9BBA135}" dt="2026-06-22T05:38:01.892" v="440" actId="207"/>
+          <ac:spMkLst>
+            <pc:docMk/>
+            <pc:sldMk cId="0" sldId="269"/>
+            <ac:spMk id="3" creationId="{2982B2B6-1C61-75F1-2661-D5CAD30FE301}"/>
+          </ac:spMkLst>
+        </pc:spChg>
+        <pc:spChg chg="mod">
+          <ac:chgData name="Stalin Iosif" userId="f6dc6f5d266124aa" providerId="LiveId" clId="{48C118C6-7036-4C7F-BA2D-46EAD9BBA135}" dt="2026-06-22T05:38:05.655" v="441" actId="207"/>
+          <ac:spMkLst>
+            <pc:docMk/>
+            <pc:sldMk cId="0" sldId="269"/>
+            <ac:spMk id="4" creationId="{5993216D-4881-13D5-87DC-354C0FD22C9E}"/>
+          </ac:spMkLst>
+        </pc:spChg>
+      </pc:sldChg>
+      <pc:sldChg chg="modSp mod">
+        <pc:chgData name="Stalin Iosif" userId="f6dc6f5d266124aa" providerId="LiveId" clId="{48C118C6-7036-4C7F-BA2D-46EAD9BBA135}" dt="2026-06-22T05:02:53.616" v="88" actId="207"/>
+        <pc:sldMkLst>
+          <pc:docMk/>
+          <pc:sldMk cId="0" sldId="270"/>
+        </pc:sldMkLst>
+        <pc:spChg chg="mod">
+          <ac:chgData name="Stalin Iosif" userId="f6dc6f5d266124aa" providerId="LiveId" clId="{48C118C6-7036-4C7F-BA2D-46EAD9BBA135}" dt="2026-06-22T05:02:53.616" v="88" actId="207"/>
+          <ac:spMkLst>
+            <pc:docMk/>
+            <pc:sldMk cId="0" sldId="270"/>
+            <ac:spMk id="2" creationId="{E871FB2A-D6EA-0BD5-32A1-748C37EA8669}"/>
+          </ac:spMkLst>
+        </pc:spChg>
+      </pc:sldChg>
+      <pc:sldChg chg="modSp mod">
+        <pc:chgData name="Stalin Iosif" userId="f6dc6f5d266124aa" providerId="LiveId" clId="{48C118C6-7036-4C7F-BA2D-46EAD9BBA135}" dt="2026-06-22T05:03:10.315" v="90" actId="207"/>
+        <pc:sldMkLst>
+          <pc:docMk/>
+          <pc:sldMk cId="0" sldId="271"/>
+        </pc:sldMkLst>
+        <pc:spChg chg="mod">
+          <ac:chgData name="Stalin Iosif" userId="f6dc6f5d266124aa" providerId="LiveId" clId="{48C118C6-7036-4C7F-BA2D-46EAD9BBA135}" dt="2026-06-22T05:03:10.315" v="90" actId="207"/>
+          <ac:spMkLst>
+            <pc:docMk/>
+            <pc:sldMk cId="0" sldId="271"/>
+            <ac:spMk id="2" creationId="{E8011DC5-2FB5-DE89-3BD3-F1B6ECB4AF2D}"/>
+          </ac:spMkLst>
+        </pc:spChg>
+      </pc:sldChg>
+      <pc:sldChg chg="modSp mod">
+        <pc:chgData name="Stalin Iosif" userId="f6dc6f5d266124aa" providerId="LiveId" clId="{48C118C6-7036-4C7F-BA2D-46EAD9BBA135}" dt="2026-06-22T05:03:18.837" v="92"/>
+        <pc:sldMkLst>
+          <pc:docMk/>
+          <pc:sldMk cId="1149303165" sldId="272"/>
+        </pc:sldMkLst>
+        <pc:spChg chg="mod">
+          <ac:chgData name="Stalin Iosif" userId="f6dc6f5d266124aa" providerId="LiveId" clId="{48C118C6-7036-4C7F-BA2D-46EAD9BBA135}" dt="2026-06-22T05:03:18.837" v="92"/>
+          <ac:spMkLst>
+            <pc:docMk/>
+            <pc:sldMk cId="1149303165" sldId="272"/>
+            <ac:spMk id="2" creationId="{485F84BC-48BD-1188-548C-7F54DBD56440}"/>
+          </ac:spMkLst>
+        </pc:spChg>
+      </pc:sldChg>
+      <pc:sldChg chg="addSp delSp modSp new mod">
+        <pc:chgData name="Stalin Iosif" userId="f6dc6f5d266124aa" providerId="LiveId" clId="{48C118C6-7036-4C7F-BA2D-46EAD9BBA135}" dt="2026-06-22T05:48:09.619" v="529" actId="5793"/>
+        <pc:sldMkLst>
+          <pc:docMk/>
+          <pc:sldMk cId="1827832951" sldId="273"/>
+        </pc:sldMkLst>
+        <pc:spChg chg="mod">
+          <ac:chgData name="Stalin Iosif" userId="f6dc6f5d266124aa" providerId="LiveId" clId="{48C118C6-7036-4C7F-BA2D-46EAD9BBA135}" dt="2026-06-22T05:41:28.378" v="466" actId="20577"/>
+          <ac:spMkLst>
+            <pc:docMk/>
+            <pc:sldMk cId="1827832951" sldId="273"/>
+            <ac:spMk id="2" creationId="{7998B13D-16BC-3DE7-39C3-DBEE8FBF81EB}"/>
+          </ac:spMkLst>
+        </pc:spChg>
+        <pc:spChg chg="mod">
+          <ac:chgData name="Stalin Iosif" userId="f6dc6f5d266124aa" providerId="LiveId" clId="{48C118C6-7036-4C7F-BA2D-46EAD9BBA135}" dt="2026-06-22T05:48:09.619" v="529" actId="5793"/>
+          <ac:spMkLst>
+            <pc:docMk/>
+            <pc:sldMk cId="1827832951" sldId="273"/>
+            <ac:spMk id="3" creationId="{9DC78761-98B4-F196-CD3A-E7412E81949D}"/>
+          </ac:spMkLst>
+        </pc:spChg>
+        <pc:picChg chg="add del mod">
+          <ac:chgData name="Stalin Iosif" userId="f6dc6f5d266124aa" providerId="LiveId" clId="{48C118C6-7036-4C7F-BA2D-46EAD9BBA135}" dt="2026-06-22T05:47:09.021" v="479" actId="21"/>
+          <ac:picMkLst>
+            <pc:docMk/>
+            <pc:sldMk cId="1827832951" sldId="273"/>
+            <ac:picMk id="5" creationId="{9E89C1D1-37C4-EC59-9929-F2625DFEA56E}"/>
+          </ac:picMkLst>
+        </pc:picChg>
+        <pc:picChg chg="add del mod">
+          <ac:chgData name="Stalin Iosif" userId="f6dc6f5d266124aa" providerId="LiveId" clId="{48C118C6-7036-4C7F-BA2D-46EAD9BBA135}" dt="2026-06-22T05:47:04.080" v="478" actId="21"/>
+          <ac:picMkLst>
+            <pc:docMk/>
+            <pc:sldMk cId="1827832951" sldId="273"/>
+            <ac:picMk id="7" creationId="{02A819CD-D6D7-A0A6-31D0-A066F8864E99}"/>
+          </ac:picMkLst>
+        </pc:picChg>
+        <pc:picChg chg="add del mod">
+          <ac:chgData name="Stalin Iosif" userId="f6dc6f5d266124aa" providerId="LiveId" clId="{48C118C6-7036-4C7F-BA2D-46EAD9BBA135}" dt="2026-06-22T05:47:10.734" v="481"/>
+          <ac:picMkLst>
+            <pc:docMk/>
+            <pc:sldMk cId="1827832951" sldId="273"/>
+            <ac:picMk id="8" creationId="{564A1F4B-2D74-B226-8DAC-0C97255F3140}"/>
+          </ac:picMkLst>
+        </pc:picChg>
+        <pc:picChg chg="add mod">
+          <ac:chgData name="Stalin Iosif" userId="f6dc6f5d266124aa" providerId="LiveId" clId="{48C118C6-7036-4C7F-BA2D-46EAD9BBA135}" dt="2026-06-22T05:48:06.661" v="528" actId="1076"/>
+          <ac:picMkLst>
+            <pc:docMk/>
+            <pc:sldMk cId="1827832951" sldId="273"/>
+            <ac:picMk id="10" creationId="{1EC092E4-A28C-A676-725C-D7FC2E90DA82}"/>
+          </ac:picMkLst>
+        </pc:picChg>
+      </pc:sldChg>
+    </pc:docChg>
+  </pc:docChgLst>
+</pc:chgInfo>
 </file>
 
 <file path=ppt/notesMasters/notesMaster1.xml><?xml version="1.0" encoding="utf-8"?>
@@ -535,7 +807,7 @@
           <a:p>
             <a:fld id="{6C72CF0F-C669-487E-A11E-1ABBD0147F22}" type="slidenum">
               <a:rPr lang="ru-RU" smtClean="0"/>
-              <a:t>9</a:t>
+              <a:t>10</a:t>
             </a:fld>
             <a:endParaRPr lang="ru-RU"/>
           </a:p>
@@ -14990,7 +15262,7 @@
             <a:fld id="{99C5D761-B4DD-4851-8980-6870C668C052}" type="datetime1">
               <a:rPr lang="en-US"/>
               <a:pPr lvl="0"/>
-              <a:t>6/20/2026</a:t>
+              <a:t>6/22/2026</a:t>
             </a:fld>
             <a:endParaRPr lang="en-US"/>
           </a:p>
@@ -19331,27 +19603,27 @@
               <a:buNone/>
             </a:pPr>
             <a:r>
-              <a:rPr lang="ru-RU" sz="2200">
-                <a:solidFill>
-                  <a:srgbClr val="262626"/>
+              <a:rPr lang="ru-RU" sz="2200" dirty="0">
+                <a:solidFill>
+                  <a:schemeClr val="bg1"/>
                 </a:solidFill>
                 <a:latin typeface="Arial"/>
               </a:rPr>
               <a:t>Дисциплина: Информационные технологии, языки программирования(</a:t>
             </a:r>
             <a:r>
-              <a:rPr lang="en-GB" sz="2200">
-                <a:solidFill>
-                  <a:srgbClr val="262626"/>
+              <a:rPr lang="en-GB" sz="2200" dirty="0">
+                <a:solidFill>
+                  <a:schemeClr val="bg1"/>
                 </a:solidFill>
                 <a:latin typeface="Arial"/>
               </a:rPr>
               <a:t>Python</a:t>
             </a:r>
             <a:r>
-              <a:rPr lang="ru-RU" sz="2200">
-                <a:solidFill>
-                  <a:srgbClr val="262626"/>
+              <a:rPr lang="ru-RU" sz="2200" dirty="0">
+                <a:solidFill>
+                  <a:schemeClr val="bg1"/>
                 </a:solidFill>
                 <a:latin typeface="Arial"/>
               </a:rPr>
@@ -19365,7 +19637,7 @@
               </a:lnSpc>
               <a:buNone/>
             </a:pPr>
-            <a:endParaRPr lang="ru-RU" sz="2200">
+            <a:endParaRPr lang="ru-RU" sz="2200" dirty="0">
               <a:solidFill>
                 <a:srgbClr val="262626"/>
               </a:solidFill>
@@ -19424,9 +19696,9 @@
               </a:defRPr>
             </a:pPr>
             <a:r>
-              <a:rPr lang="ru-RU" sz="1800" b="0" i="0" u="none" strike="noStrike" kern="1200" cap="none" spc="0" baseline="0">
-                <a:solidFill>
-                  <a:srgbClr val="000000"/>
+              <a:rPr lang="ru-RU" sz="1800" b="0" i="0" u="none" strike="noStrike" kern="1200" cap="none" spc="0" baseline="0" dirty="0">
+                <a:solidFill>
+                  <a:schemeClr val="bg1"/>
                 </a:solidFill>
                 <a:uFillTx/>
                 <a:latin typeface="Arial"/>
@@ -19436,9 +19708,9 @@
               <a:t>Выполнил: </a:t>
             </a:r>
             <a:r>
-              <a:rPr lang="ru-RU" sz="1800" b="0" i="0" u="none" strike="noStrike" kern="0" cap="none" spc="0" baseline="0">
-                <a:solidFill>
-                  <a:srgbClr val="000000"/>
+              <a:rPr lang="ru-RU" sz="1800" b="0" i="0" u="none" strike="noStrike" kern="0" cap="none" spc="0" baseline="0" dirty="0">
+                <a:solidFill>
+                  <a:schemeClr val="bg1"/>
                 </a:solidFill>
                 <a:uFillTx/>
                 <a:latin typeface="Arial"/>
@@ -19448,9 +19720,9 @@
               <a:t>Антипин</a:t>
             </a:r>
             <a:r>
-              <a:rPr lang="ru-RU" sz="1800" b="0" i="0" u="none" strike="noStrike" kern="1200" cap="none" spc="0" baseline="0">
-                <a:solidFill>
-                  <a:srgbClr val="000000"/>
+              <a:rPr lang="ru-RU" sz="1800" b="0" i="0" u="none" strike="noStrike" kern="1200" cap="none" spc="0" baseline="0" dirty="0">
+                <a:solidFill>
+                  <a:schemeClr val="bg1"/>
                 </a:solidFill>
                 <a:uFillTx/>
                 <a:latin typeface="Arial"/>
@@ -19481,9 +19753,9 @@
               </a:defRPr>
             </a:pPr>
             <a:r>
-              <a:rPr lang="ru-RU" sz="1800" b="0" i="0" u="none" strike="noStrike" kern="1200" cap="none" spc="0" baseline="0">
-                <a:solidFill>
-                  <a:srgbClr val="000000"/>
+              <a:rPr lang="ru-RU" sz="1800" b="0" i="0" u="none" strike="noStrike" kern="1200" cap="none" spc="0" baseline="0" dirty="0">
+                <a:solidFill>
+                  <a:schemeClr val="bg1"/>
                 </a:solidFill>
                 <a:uFillTx/>
                 <a:latin typeface="Arial"/>
@@ -19504,6 +19776,139 @@
 </file>
 
 <file path=ppt/slides/slide10.xml><?xml version="1.0" encoding="utf-8"?>
+<p:sld xmlns:a="http://schemas.openxmlformats.org/drawingml/2006/main" xmlns:r="http://schemas.openxmlformats.org/officeDocument/2006/relationships" xmlns:p="http://schemas.openxmlformats.org/presentationml/2006/main">
+  <p:cSld name="Slide16">
+    <p:spTree>
+      <p:nvGrpSpPr>
+        <p:cNvPr id="1" name=""/>
+        <p:cNvGrpSpPr/>
+        <p:nvPr/>
+      </p:nvGrpSpPr>
+      <p:grpSpPr>
+        <a:xfrm>
+          <a:off x="0" y="0"/>
+          <a:ext cx="0" cy="0"/>
+          <a:chOff x="0" y="0"/>
+          <a:chExt cx="0" cy="0"/>
+        </a:xfrm>
+      </p:grpSpPr>
+      <p:sp>
+        <p:nvSpPr>
+          <p:cNvPr id="2" name="Объект 1">
+            <a:extLst>
+              <a:ext uri="{FF2B5EF4-FFF2-40B4-BE49-F238E27FC236}">
+                <a16:creationId xmlns:a16="http://schemas.microsoft.com/office/drawing/2014/main" id="{E8011DC5-2FB5-DE89-3BD3-F1B6ECB4AF2D}"/>
+              </a:ext>
+            </a:extLst>
+          </p:cNvPr>
+          <p:cNvSpPr txBox="1">
+            <a:spLocks noGrp="1"/>
+          </p:cNvSpPr>
+          <p:nvPr>
+            <p:ph idx="1"/>
+          </p:nvPr>
+        </p:nvSpPr>
+        <p:spPr>
+          <a:xfrm>
+            <a:off x="838200" y="690602"/>
+            <a:ext cx="10515600" cy="1265035"/>
+          </a:xfrm>
+        </p:spPr>
+        <p:txBody>
+          <a:bodyPr/>
+          <a:lstStyle/>
+          <a:p>
+            <a:pPr marL="0" lvl="0" indent="0">
+              <a:lnSpc>
+                <a:spcPct val="90000"/>
+              </a:lnSpc>
+              <a:buNone/>
+            </a:pPr>
+            <a:r>
+              <a:rPr lang="ru-RU" sz="4000" dirty="0">
+                <a:solidFill>
+                  <a:schemeClr val="bg1"/>
+                </a:solidFill>
+              </a:rPr>
+              <a:t>Пример работы</a:t>
+            </a:r>
+            <a:endParaRPr lang="ru-RU" dirty="0">
+              <a:solidFill>
+                <a:schemeClr val="bg1"/>
+              </a:solidFill>
+            </a:endParaRPr>
+          </a:p>
+        </p:txBody>
+      </p:sp>
+      <p:pic>
+        <p:nvPicPr>
+          <p:cNvPr id="13" name="Рисунок 12">
+            <a:extLst>
+              <a:ext uri="{FF2B5EF4-FFF2-40B4-BE49-F238E27FC236}">
+                <a16:creationId xmlns:a16="http://schemas.microsoft.com/office/drawing/2014/main" id="{174E5917-1477-8325-BC36-BE65EEC9F4DE}"/>
+              </a:ext>
+            </a:extLst>
+          </p:cNvPr>
+          <p:cNvPicPr>
+            <a:picLocks noChangeAspect="1"/>
+          </p:cNvPicPr>
+          <p:nvPr/>
+        </p:nvPicPr>
+        <p:blipFill>
+          <a:blip r:embed="rId3"/>
+          <a:stretch>
+            <a:fillRect/>
+          </a:stretch>
+        </p:blipFill>
+        <p:spPr>
+          <a:xfrm>
+            <a:off x="1070740" y="1955637"/>
+            <a:ext cx="4191585" cy="2095792"/>
+          </a:xfrm>
+          <a:prstGeom prst="rect">
+            <a:avLst/>
+          </a:prstGeom>
+        </p:spPr>
+      </p:pic>
+      <p:pic>
+        <p:nvPicPr>
+          <p:cNvPr id="15" name="Рисунок 14">
+            <a:extLst>
+              <a:ext uri="{FF2B5EF4-FFF2-40B4-BE49-F238E27FC236}">
+                <a16:creationId xmlns:a16="http://schemas.microsoft.com/office/drawing/2014/main" id="{9F2264A0-DF30-F6B2-4543-D9E180AA3DF1}"/>
+              </a:ext>
+            </a:extLst>
+          </p:cNvPr>
+          <p:cNvPicPr>
+            <a:picLocks noChangeAspect="1"/>
+          </p:cNvPicPr>
+          <p:nvPr/>
+        </p:nvPicPr>
+        <p:blipFill>
+          <a:blip r:embed="rId4"/>
+          <a:stretch>
+            <a:fillRect/>
+          </a:stretch>
+        </p:blipFill>
+        <p:spPr>
+          <a:xfrm>
+            <a:off x="6389915" y="1955637"/>
+            <a:ext cx="4305901" cy="2162477"/>
+          </a:xfrm>
+          <a:prstGeom prst="rect">
+            <a:avLst/>
+          </a:prstGeom>
+        </p:spPr>
+      </p:pic>
+    </p:spTree>
+  </p:cSld>
+  <p:clrMapOvr>
+    <a:masterClrMapping/>
+  </p:clrMapOvr>
+</p:sld>
+</file>
+
+<file path=ppt/slides/slide11.xml><?xml version="1.0" encoding="utf-8"?>
 <p:sld xmlns:a="http://schemas.openxmlformats.org/drawingml/2006/main" xmlns:r="http://schemas.openxmlformats.org/officeDocument/2006/relationships" xmlns:p="http://schemas.openxmlformats.org/presentationml/2006/main">
   <p:cSld name="Slide8">
     <p:spTree>
@@ -19557,11 +19962,12 @@
           <a:p>
             <a:pPr lvl="0"/>
             <a:r>
-              <a:rPr lang="ru-RU" dirty="0">
-                <a:latin typeface="Arial"/>
-              </a:rPr>
-              <a:t>Тесты</a:t>
-            </a:r>
+              <a:rPr lang="ru-RU" sz="4400" dirty="0"/>
+              <a:t>Пример работы</a:t>
+            </a:r>
+            <a:endParaRPr lang="ru-RU" dirty="0">
+              <a:latin typeface="Arial"/>
+            </a:endParaRPr>
           </a:p>
         </p:txBody>
       </p:sp>
@@ -19633,7 +20039,7 @@
 </p:sld>
 </file>
 
-<file path=ppt/slides/slide11.xml><?xml version="1.0" encoding="utf-8"?>
+<file path=ppt/slides/slide12.xml><?xml version="1.0" encoding="utf-8"?>
 <p:sld xmlns:a="http://schemas.openxmlformats.org/drawingml/2006/main" xmlns:r="http://schemas.openxmlformats.org/officeDocument/2006/relationships" xmlns:p="http://schemas.openxmlformats.org/presentationml/2006/main">
   <p:cSld>
     <p:spTree>
@@ -19672,9 +20078,10 @@
           <a:lstStyle/>
           <a:p>
             <a:r>
-              <a:rPr lang="ru-RU" dirty="0"/>
-              <a:t>Тесты</a:t>
-            </a:r>
+              <a:rPr lang="ru-RU" sz="4400" dirty="0"/>
+              <a:t>Пример работы</a:t>
+            </a:r>
+            <a:endParaRPr lang="ru-RU" dirty="0"/>
           </a:p>
         </p:txBody>
       </p:sp>
@@ -19781,7 +20188,7 @@
 </p:sld>
 </file>
 
-<file path=ppt/slides/slide12.xml><?xml version="1.0" encoding="utf-8"?>
+<file path=ppt/slides/slide13.xml><?xml version="1.0" encoding="utf-8"?>
 <p:sld xmlns:a="http://schemas.openxmlformats.org/drawingml/2006/main" xmlns:r="http://schemas.openxmlformats.org/officeDocument/2006/relationships" xmlns:p="http://schemas.openxmlformats.org/presentationml/2006/main">
   <p:cSld name="Slide9">
     <p:spTree>
@@ -19829,14 +20236,15 @@
               <a:buChar char="•"/>
             </a:pPr>
             <a:r>
-              <a:rPr lang="ru-RU" sz="1400" b="0" i="0" dirty="0">
+              <a:rPr lang="ru-RU" sz="2000" b="0" i="0" dirty="0">
                 <a:solidFill>
                   <a:srgbClr val="0F1115"/>
                 </a:solidFill>
                 <a:effectLst/>
-                <a:latin typeface="quote-cjk-patch"/>
+                <a:latin typeface="Arial" panose="020B0604020202020204" pitchFamily="34" charset="0"/>
+                <a:cs typeface="Arial" panose="020B0604020202020204" pitchFamily="34" charset="0"/>
               </a:rPr>
-              <a:t>Алгоритм вычисляет выражение за один проход по строке, без построения дерева разбора</a:t>
+              <a:t>Алгоритм вычисляет выражение за один проход по строке, без построения дерева разбора.</a:t>
             </a:r>
           </a:p>
           <a:p>
@@ -19845,14 +20253,15 @@
               <a:buChar char="•"/>
             </a:pPr>
             <a:r>
-              <a:rPr lang="ru-RU" sz="1400" b="0" i="0" dirty="0">
+              <a:rPr lang="ru-RU" sz="2000" b="0" i="0" dirty="0">
                 <a:solidFill>
                   <a:srgbClr val="0F1115"/>
                 </a:solidFill>
                 <a:effectLst/>
-                <a:latin typeface="quote-cjk-patch"/>
+                <a:latin typeface="Arial" panose="020B0604020202020204" pitchFamily="34" charset="0"/>
+                <a:cs typeface="Arial" panose="020B0604020202020204" pitchFamily="34" charset="0"/>
               </a:rPr>
-              <a:t>Стек работает по принципу LIFO: операции и числа складываются, при закрывающей скобке выполняется самая вложенная операция первой</a:t>
+              <a:t>Стек работает по принципу LIFO: операции и числа складываются, при закрывающей скобке выполняется самая вложенная операция первой.</a:t>
             </a:r>
           </a:p>
           <a:p>
@@ -19861,14 +20270,15 @@
               <a:buChar char="•"/>
             </a:pPr>
             <a:r>
-              <a:rPr lang="ru-RU" sz="1400" b="0" i="0" dirty="0">
+              <a:rPr lang="ru-RU" sz="2000" b="0" i="0" dirty="0">
                 <a:solidFill>
                   <a:srgbClr val="0F1115"/>
                 </a:solidFill>
                 <a:effectLst/>
-                <a:latin typeface="quote-cjk-patch"/>
+                <a:latin typeface="Arial" panose="020B0604020202020204" pitchFamily="34" charset="0"/>
+                <a:cs typeface="Arial" panose="020B0604020202020204" pitchFamily="34" charset="0"/>
               </a:rPr>
-              <a:t>Программа проверяет ввод: недопустимые символы, баланс скобок, пустая строка</a:t>
+              <a:t>Программа проверяет ввод: недопустимые символы, баланс скобок, пустая строка.</a:t>
             </a:r>
           </a:p>
           <a:p>
@@ -19877,14 +20287,15 @@
               <a:buChar char="•"/>
             </a:pPr>
             <a:r>
-              <a:rPr lang="ru-RU" sz="1400" b="0" i="0" dirty="0">
+              <a:rPr lang="ru-RU" sz="2000" b="0" i="0" dirty="0">
                 <a:solidFill>
                   <a:srgbClr val="0F1115"/>
                 </a:solidFill>
                 <a:effectLst/>
-                <a:latin typeface="quote-cjk-patch"/>
+                <a:latin typeface="Arial" panose="020B0604020202020204" pitchFamily="34" charset="0"/>
+                <a:cs typeface="Arial" panose="020B0604020202020204" pitchFamily="34" charset="0"/>
               </a:rPr>
-              <a:t>Сделано удобное меню с подсказками</a:t>
+              <a:t>Сделано удобное меню с подсказками.</a:t>
             </a:r>
           </a:p>
           <a:p>
@@ -19893,58 +20304,60 @@
               <a:buChar char="•"/>
             </a:pPr>
             <a:r>
-              <a:rPr lang="ru-RU" sz="1400" b="0" i="0" dirty="0">
+              <a:rPr lang="ru-RU" sz="2000" b="0" i="0" dirty="0">
                 <a:solidFill>
                   <a:srgbClr val="0F1115"/>
                 </a:solidFill>
                 <a:effectLst/>
-                <a:latin typeface="quote-cjk-patch"/>
+                <a:latin typeface="Arial" panose="020B0604020202020204" pitchFamily="34" charset="0"/>
+                <a:cs typeface="Arial" panose="020B0604020202020204" pitchFamily="34" charset="0"/>
               </a:rPr>
-              <a:t>Код разбит на два модуля: stack.py и main.py</a:t>
-            </a:r>
+              <a:t>Код разбит на два модуля: stack.py и main</a:t>
+            </a:r>
+            <a:r>
+              <a:rPr lang="ru-RU" sz="2000" b="0" i="0">
+                <a:solidFill>
+                  <a:srgbClr val="0F1115"/>
+                </a:solidFill>
+                <a:effectLst/>
+                <a:latin typeface="Arial" panose="020B0604020202020204" pitchFamily="34" charset="0"/>
+                <a:cs typeface="Arial" panose="020B0604020202020204" pitchFamily="34" charset="0"/>
+              </a:rPr>
+              <a:t>.py.</a:t>
+            </a:r>
+            <a:endParaRPr lang="ru-RU" sz="2000" b="0" i="0" dirty="0">
+              <a:solidFill>
+                <a:srgbClr val="0F1115"/>
+              </a:solidFill>
+              <a:effectLst/>
+              <a:latin typeface="Arial" panose="020B0604020202020204" pitchFamily="34" charset="0"/>
+              <a:cs typeface="Arial" panose="020B0604020202020204" pitchFamily="34" charset="0"/>
+            </a:endParaRPr>
           </a:p>
           <a:p>
             <a:pPr marL="0" indent="0" algn="l">
               <a:buNone/>
             </a:pPr>
             <a:r>
-              <a:rPr lang="ru-RU" sz="1400" dirty="0">
+              <a:rPr lang="ru-RU" sz="2000" dirty="0">
                 <a:solidFill>
                   <a:srgbClr val="0F1115"/>
                 </a:solidFill>
-                <a:latin typeface="quote-cjk-patch"/>
+                <a:latin typeface="Arial" panose="020B0604020202020204" pitchFamily="34" charset="0"/>
+                <a:cs typeface="Arial" panose="020B0604020202020204" pitchFamily="34" charset="0"/>
               </a:rPr>
               <a:t>П</a:t>
             </a:r>
             <a:r>
-              <a:rPr lang="ru-RU" sz="1400" b="0" i="0" dirty="0">
+              <a:rPr lang="ru-RU" sz="2000" b="0" i="0" dirty="0">
                 <a:solidFill>
                   <a:srgbClr val="0F1115"/>
                 </a:solidFill>
                 <a:effectLst/>
-                <a:latin typeface="quote-cjk-patch"/>
+                <a:latin typeface="Arial" panose="020B0604020202020204" pitchFamily="34" charset="0"/>
+                <a:cs typeface="Arial" panose="020B0604020202020204" pitchFamily="34" charset="0"/>
               </a:rPr>
-              <a:t>рограмма корректно вычисляет вложенные выражения с операциями минимума </a:t>
-            </a:r>
-            <a:r>
-              <a:rPr lang="ru-RU" sz="1400" b="0" i="0">
-                <a:solidFill>
-                  <a:srgbClr val="0F1115"/>
-                </a:solidFill>
-                <a:effectLst/>
-                <a:latin typeface="quote-cjk-patch"/>
-              </a:rPr>
-              <a:t>и максимума. </a:t>
-            </a:r>
-            <a:r>
-              <a:rPr lang="ru-RU" sz="1400" b="0" i="0" dirty="0">
-                <a:solidFill>
-                  <a:srgbClr val="0F1115"/>
-                </a:solidFill>
-                <a:effectLst/>
-                <a:latin typeface="quote-cjk-patch"/>
-              </a:rPr>
-              <a:t>Все тесты пройдены, ошибок нет. </a:t>
+              <a:t>рограмма корректно вычисляет вложенные выражения с операциями минимума и максимума. Все тесты пройдены, ошибок нет. </a:t>
             </a:r>
             <a:br>
               <a:rPr lang="ru-RU" sz="1400" dirty="0"/>
@@ -20049,7 +20462,7 @@
           <a:p>
             <a:pPr algn="l"/>
             <a:r>
-              <a:rPr lang="ru-RU" sz="1400" b="0" i="0" dirty="0">
+              <a:rPr lang="ru-RU" sz="2000" b="0" i="0" dirty="0">
                 <a:solidFill>
                   <a:srgbClr val="0F1115"/>
                 </a:solidFill>
@@ -20057,7 +20470,7 @@
                 <a:latin typeface="Arial" panose="020B0604020202020204" pitchFamily="34" charset="0"/>
                 <a:cs typeface="Arial" panose="020B0604020202020204" pitchFamily="34" charset="0"/>
               </a:rPr>
-              <a:t>Дана строка без пробелов, содержащая вложенные операции:</a:t>
+              <a:t>Дана строка, содержащая вложенные операции:</a:t>
             </a:r>
           </a:p>
           <a:p>
@@ -20066,7 +20479,7 @@
               <a:buChar char="•"/>
             </a:pPr>
             <a:r>
-              <a:rPr lang="ru-RU" sz="1400" b="0" i="0" dirty="0">
+              <a:rPr lang="ru-RU" sz="2000" b="0" i="0" dirty="0">
                 <a:solidFill>
                   <a:srgbClr val="0F1115"/>
                 </a:solidFill>
@@ -20083,7 +20496,7 @@
               <a:buChar char="•"/>
             </a:pPr>
             <a:r>
-              <a:rPr lang="ru-RU" sz="1400" b="0" i="0" dirty="0">
+              <a:rPr lang="ru-RU" sz="2000" b="0" i="0" dirty="0">
                 <a:solidFill>
                   <a:srgbClr val="0F1115"/>
                 </a:solidFill>
@@ -20097,7 +20510,7 @@
           <a:p>
             <a:pPr algn="l"/>
             <a:r>
-              <a:rPr lang="ru-RU" sz="1400" b="0" i="0" dirty="0">
+              <a:rPr lang="ru-RU" sz="2000" b="0" i="0" dirty="0">
                 <a:solidFill>
                   <a:srgbClr val="0F1115"/>
                 </a:solidFill>
@@ -20111,7 +20524,7 @@
           <a:p>
             <a:pPr algn="l"/>
             <a:r>
-              <a:rPr lang="ru-RU" sz="1400" b="0" i="0" dirty="0">
+              <a:rPr lang="ru-RU" sz="2000" b="0" i="0" dirty="0">
                 <a:solidFill>
                   <a:srgbClr val="0F1115"/>
                 </a:solidFill>
@@ -20225,7 +20638,7 @@
         <p:spPr/>
         <p:txBody>
           <a:bodyPr>
-            <a:normAutofit/>
+            <a:normAutofit fontScale="92500" lnSpcReduction="20000"/>
           </a:bodyPr>
           <a:lstStyle/>
           <a:p>
@@ -20233,7 +20646,7 @@
               <a:buNone/>
             </a:pPr>
             <a:r>
-              <a:rPr lang="ru-RU" sz="1400" b="0" i="0" dirty="0">
+              <a:rPr lang="ru-RU" sz="1700" b="0" i="0" dirty="0">
                 <a:solidFill>
                   <a:srgbClr val="0F1115"/>
                 </a:solidFill>
@@ -20244,7 +20657,7 @@
               <a:t>Входные данные: строка без пробелов с операциями m(</a:t>
             </a:r>
             <a:r>
-              <a:rPr lang="ru-RU" sz="1400" b="0" i="0" dirty="0" err="1">
+              <a:rPr lang="ru-RU" sz="1700" b="0" i="0" dirty="0" err="1">
                 <a:solidFill>
                   <a:srgbClr val="0F1115"/>
                 </a:solidFill>
@@ -20255,7 +20668,7 @@
               <a:t>a,b</a:t>
             </a:r>
             <a:r>
-              <a:rPr lang="ru-RU" sz="1400" b="0" i="0" dirty="0">
+              <a:rPr lang="ru-RU" sz="1700" b="0" i="0" dirty="0">
                 <a:solidFill>
                   <a:srgbClr val="0F1115"/>
                 </a:solidFill>
@@ -20266,7 +20679,7 @@
               <a:t>) и M(</a:t>
             </a:r>
             <a:r>
-              <a:rPr lang="ru-RU" sz="1400" b="0" i="0" dirty="0" err="1">
+              <a:rPr lang="ru-RU" sz="1700" b="0" i="0" dirty="0" err="1">
                 <a:solidFill>
                   <a:srgbClr val="0F1115"/>
                 </a:solidFill>
@@ -20277,7 +20690,7 @@
               <a:t>a,b</a:t>
             </a:r>
             <a:r>
-              <a:rPr lang="ru-RU" sz="1400" b="0" i="0" dirty="0">
+              <a:rPr lang="ru-RU" sz="1700" b="0" i="0" dirty="0">
                 <a:solidFill>
                   <a:srgbClr val="0F1115"/>
                 </a:solidFill>
@@ -20289,9 +20702,11 @@
             </a:r>
           </a:p>
           <a:p>
-            <a:pPr algn="l"/>
-            <a:r>
-              <a:rPr lang="ru-RU" sz="1400" b="0" i="0" dirty="0">
+            <a:pPr marL="0" indent="0" algn="l">
+              <a:buNone/>
+            </a:pPr>
+            <a:r>
+              <a:rPr lang="ru-RU" sz="1700" b="0" i="0" dirty="0">
                 <a:solidFill>
                   <a:srgbClr val="0F1115"/>
                 </a:solidFill>
@@ -20308,7 +20723,7 @@
               <a:buChar char="•"/>
             </a:pPr>
             <a:r>
-              <a:rPr lang="ru-RU" sz="1400" b="0" i="0" dirty="0">
+              <a:rPr lang="ru-RU" sz="1700" b="0" i="0" dirty="0">
                 <a:solidFill>
                   <a:srgbClr val="0F1115"/>
                 </a:solidFill>
@@ -20325,7 +20740,7 @@
               <a:buChar char="•"/>
             </a:pPr>
             <a:r>
-              <a:rPr lang="ru-RU" sz="1400" b="0" i="0" dirty="0">
+              <a:rPr lang="ru-RU" sz="1700" b="0" i="0" dirty="0">
                 <a:solidFill>
                   <a:srgbClr val="0F1115"/>
                 </a:solidFill>
@@ -20342,7 +20757,7 @@
               <a:buChar char="•"/>
             </a:pPr>
             <a:r>
-              <a:rPr lang="ru-RU" sz="1400" b="0" i="0" dirty="0">
+              <a:rPr lang="ru-RU" sz="1700" b="0" i="0" dirty="0">
                 <a:solidFill>
                   <a:srgbClr val="0F1115"/>
                 </a:solidFill>
@@ -20358,7 +20773,7 @@
               <a:buNone/>
             </a:pPr>
             <a:r>
-              <a:rPr lang="ru-RU" sz="1400" b="0" i="0" dirty="0">
+              <a:rPr lang="ru-RU" sz="1700" b="0" i="0" dirty="0">
                 <a:solidFill>
                   <a:srgbClr val="0F1115"/>
                 </a:solidFill>
@@ -20375,7 +20790,7 @@
               <a:buChar char="•"/>
             </a:pPr>
             <a:r>
-              <a:rPr lang="ru-RU" sz="1400" b="0" i="0" dirty="0">
+              <a:rPr lang="ru-RU" sz="1700" b="0" i="0" dirty="0">
                 <a:solidFill>
                   <a:srgbClr val="0F1115"/>
                 </a:solidFill>
@@ -20386,7 +20801,7 @@
               <a:t>Собственный класс </a:t>
             </a:r>
             <a:r>
-              <a:rPr lang="ru-RU" sz="1400" b="0" i="0" dirty="0" err="1">
+              <a:rPr lang="ru-RU" sz="1700" b="0" i="0" dirty="0" err="1">
                 <a:solidFill>
                   <a:srgbClr val="0F1115"/>
                 </a:solidFill>
@@ -20396,7 +20811,7 @@
               </a:rPr>
               <a:t>Stack</a:t>
             </a:r>
-            <a:endParaRPr lang="ru-RU" sz="1400" b="0" i="0" dirty="0">
+            <a:endParaRPr lang="ru-RU" sz="1700" b="0" i="0" dirty="0">
               <a:solidFill>
                 <a:srgbClr val="0F1115"/>
               </a:solidFill>
@@ -20411,7 +20826,7 @@
               <a:buChar char="•"/>
             </a:pPr>
             <a:r>
-              <a:rPr lang="ru-RU" sz="1400" b="0" i="0" dirty="0">
+              <a:rPr lang="ru-RU" sz="1700" b="0" i="0" dirty="0">
                 <a:solidFill>
                   <a:srgbClr val="0F1115"/>
                 </a:solidFill>
@@ -20428,7 +20843,7 @@
               <a:buChar char="•"/>
             </a:pPr>
             <a:r>
-              <a:rPr lang="ru-RU" sz="1400" b="0" i="0" dirty="0">
+              <a:rPr lang="ru-RU" sz="1700" b="0" i="0" dirty="0">
                 <a:solidFill>
                   <a:srgbClr val="0F1115"/>
                 </a:solidFill>
@@ -20438,6 +20853,95 @@
               </a:rPr>
               <a:t>Однопроходный разбор строки</a:t>
             </a:r>
+          </a:p>
+          <a:p>
+            <a:pPr marL="0" indent="0">
+              <a:buNone/>
+            </a:pPr>
+            <a:r>
+              <a:rPr lang="ru-RU" sz="1700" b="0" i="0" dirty="0">
+                <a:solidFill>
+                  <a:srgbClr val="0F1115"/>
+                </a:solidFill>
+                <a:effectLst/>
+                <a:latin typeface="Arial" panose="020B0604020202020204" pitchFamily="34" charset="0"/>
+                <a:cs typeface="Arial" panose="020B0604020202020204" pitchFamily="34" charset="0"/>
+              </a:rPr>
+              <a:t>Требования:</a:t>
+            </a:r>
+          </a:p>
+          <a:p>
+            <a:r>
+              <a:rPr lang="ru-RU" sz="1700" b="0" i="0" dirty="0">
+                <a:solidFill>
+                  <a:srgbClr val="0F1115"/>
+                </a:solidFill>
+                <a:effectLst/>
+                <a:latin typeface="Arial" panose="020B0604020202020204" pitchFamily="34" charset="0"/>
+                <a:cs typeface="Arial" panose="020B0604020202020204" pitchFamily="34" charset="0"/>
+              </a:rPr>
+              <a:t>Пользовательский интерфейс</a:t>
+            </a:r>
+          </a:p>
+          <a:p>
+            <a:r>
+              <a:rPr lang="ru-RU" sz="1700" dirty="0">
+                <a:solidFill>
+                  <a:srgbClr val="0F1115"/>
+                </a:solidFill>
+                <a:latin typeface="Arial" panose="020B0604020202020204" pitchFamily="34" charset="0"/>
+                <a:cs typeface="Arial" panose="020B0604020202020204" pitchFamily="34" charset="0"/>
+              </a:rPr>
+              <a:t>Не </a:t>
+            </a:r>
+            <a:r>
+              <a:rPr lang="en-US" sz="1700" dirty="0">
+                <a:solidFill>
+                  <a:srgbClr val="0F1115"/>
+                </a:solidFill>
+                <a:latin typeface="Arial" panose="020B0604020202020204" pitchFamily="34" charset="0"/>
+                <a:cs typeface="Arial" panose="020B0604020202020204" pitchFamily="34" charset="0"/>
+              </a:rPr>
+              <a:t>‘</a:t>
+            </a:r>
+            <a:r>
+              <a:rPr lang="ru-RU" sz="1700" dirty="0" err="1">
+                <a:solidFill>
+                  <a:srgbClr val="0F1115"/>
+                </a:solidFill>
+                <a:latin typeface="Arial" panose="020B0604020202020204" pitchFamily="34" charset="0"/>
+                <a:cs typeface="Arial" panose="020B0604020202020204" pitchFamily="34" charset="0"/>
+              </a:rPr>
+              <a:t>Спаггети</a:t>
+            </a:r>
+            <a:r>
+              <a:rPr lang="ru-RU" sz="1700" dirty="0">
+                <a:solidFill>
+                  <a:srgbClr val="0F1115"/>
+                </a:solidFill>
+                <a:latin typeface="Arial" panose="020B0604020202020204" pitchFamily="34" charset="0"/>
+                <a:cs typeface="Arial" panose="020B0604020202020204" pitchFamily="34" charset="0"/>
+              </a:rPr>
+              <a:t>-код</a:t>
+            </a:r>
+            <a:r>
+              <a:rPr lang="en-US" sz="1700" dirty="0">
+                <a:solidFill>
+                  <a:srgbClr val="0F1115"/>
+                </a:solidFill>
+                <a:latin typeface="Arial" panose="020B0604020202020204" pitchFamily="34" charset="0"/>
+                <a:cs typeface="Arial" panose="020B0604020202020204" pitchFamily="34" charset="0"/>
+              </a:rPr>
+              <a:t>’</a:t>
+            </a:r>
+            <a:endParaRPr lang="ru-RU" sz="1700" b="0" i="0" dirty="0">
+              <a:solidFill>
+                <a:srgbClr val="0F1115"/>
+              </a:solidFill>
+              <a:effectLst/>
+              <a:latin typeface="Arial" panose="020B0604020202020204" pitchFamily="34" charset="0"/>
+              <a:cs typeface="Arial" panose="020B0604020202020204" pitchFamily="34" charset="0"/>
+            </a:endParaRPr>
           </a:p>
           <a:p>
             <a:pPr marL="0" lvl="0" indent="0">
@@ -20597,7 +21101,7 @@
                 <a:latin typeface="Arial" pitchFamily="34"/>
                 <a:cs typeface="Arial" pitchFamily="34"/>
               </a:rPr>
-              <a:t>main.py: Интерфейс и работа с файлами.​</a:t>
+              <a:t>main.py: Интерфейс и работа с файлами. Реализация проверок на корректность ввода пользователя​</a:t>
             </a:r>
           </a:p>
           <a:p>
@@ -20621,8 +21125,69 @@
                 <a:latin typeface="Arial" pitchFamily="34"/>
                 <a:cs typeface="Arial" pitchFamily="34"/>
               </a:rPr>
-              <a:t>Основные функции программы.</a:t>
-            </a:r>
+              <a:t>Основные функции программы. Реализация стека и логики программы.</a:t>
+            </a:r>
+            <a:br>
+              <a:rPr lang="ru-RU" sz="2000" dirty="0">
+                <a:latin typeface="Arial" pitchFamily="34"/>
+                <a:cs typeface="Arial" pitchFamily="34"/>
+              </a:rPr>
+            </a:br>
+            <a:endParaRPr lang="ru-RU" sz="2000" dirty="0">
+              <a:latin typeface="Arial" pitchFamily="34"/>
+              <a:cs typeface="Arial" pitchFamily="34"/>
+            </a:endParaRPr>
+          </a:p>
+          <a:p>
+            <a:pPr marL="457200" lvl="1" indent="0">
+              <a:buNone/>
+            </a:pPr>
+            <a:r>
+              <a:rPr lang="ru-RU" sz="2000" dirty="0">
+                <a:latin typeface="Arial" pitchFamily="34"/>
+                <a:cs typeface="Arial" pitchFamily="34"/>
+              </a:rPr>
+              <a:t>Модуль(</a:t>
+            </a:r>
+            <a:r>
+              <a:rPr lang="en-US" sz="2000" dirty="0">
+                <a:latin typeface="Arial" pitchFamily="34"/>
+                <a:cs typeface="Arial" pitchFamily="34"/>
+              </a:rPr>
+              <a:t>stack.py -&gt; evaluate</a:t>
+            </a:r>
+            <a:r>
+              <a:rPr lang="ru-RU" sz="2000" dirty="0">
+                <a:latin typeface="Arial" pitchFamily="34"/>
+                <a:cs typeface="Arial" pitchFamily="34"/>
+              </a:rPr>
+              <a:t>) подключаются напрямую</a:t>
+            </a:r>
+            <a:r>
+              <a:rPr lang="en-US" sz="2000" dirty="0">
+                <a:latin typeface="Arial" pitchFamily="34"/>
+                <a:cs typeface="Arial" pitchFamily="34"/>
+              </a:rPr>
+              <a:t> </a:t>
+            </a:r>
+            <a:r>
+              <a:rPr lang="ru-RU" sz="2000" dirty="0">
+                <a:latin typeface="Arial" pitchFamily="34"/>
+                <a:cs typeface="Arial" pitchFamily="34"/>
+              </a:rPr>
+              <a:t>в </a:t>
+            </a:r>
+            <a:r>
+              <a:rPr lang="en-US" sz="2000" dirty="0">
+                <a:latin typeface="Arial" pitchFamily="34"/>
+                <a:cs typeface="Arial" pitchFamily="34"/>
+              </a:rPr>
+              <a:t>main.py</a:t>
+            </a:r>
+            <a:endParaRPr lang="ru-RU" sz="2000" dirty="0">
+              <a:latin typeface="Arial" pitchFamily="34"/>
+              <a:cs typeface="Arial" pitchFamily="34"/>
+            </a:endParaRPr>
           </a:p>
           <a:p>
             <a:pPr marL="0" lvl="0" indent="0">
@@ -20632,6 +21197,36 @@
           </a:p>
         </p:txBody>
       </p:sp>
+      <p:pic>
+        <p:nvPicPr>
+          <p:cNvPr id="7" name="Рисунок 6">
+            <a:extLst>
+              <a:ext uri="{FF2B5EF4-FFF2-40B4-BE49-F238E27FC236}">
+                <a16:creationId xmlns:a16="http://schemas.microsoft.com/office/drawing/2014/main" id="{8AF94698-1B95-4C98-4193-D86183575AFA}"/>
+              </a:ext>
+            </a:extLst>
+          </p:cNvPr>
+          <p:cNvPicPr>
+            <a:picLocks noChangeAspect="1"/>
+          </p:cNvPicPr>
+          <p:nvPr/>
+        </p:nvPicPr>
+        <p:blipFill>
+          <a:blip r:embed="rId2"/>
+          <a:stretch>
+            <a:fillRect/>
+          </a:stretch>
+        </p:blipFill>
+        <p:spPr>
+          <a:xfrm>
+            <a:off x="6648271" y="4869907"/>
+            <a:ext cx="4085849" cy="320160"/>
+          </a:xfrm>
+          <a:prstGeom prst="rect">
+            <a:avLst/>
+          </a:prstGeom>
+        </p:spPr>
+      </p:pic>
     </p:spTree>
   </p:cSld>
   <p:clrMapOvr>
@@ -20682,7 +21277,7 @@
               <a:buNone/>
             </a:pPr>
             <a:r>
-              <a:rPr lang="ru-RU" sz="1400" b="0" i="0" dirty="0">
+              <a:rPr lang="ru-RU" sz="2000" b="0" i="0" dirty="0">
                 <a:solidFill>
                   <a:srgbClr val="0F1115"/>
                 </a:solidFill>
@@ -20699,7 +21294,7 @@
               <a:buAutoNum type="arabicPeriod"/>
             </a:pPr>
             <a:r>
-              <a:rPr lang="ru-RU" sz="1400" b="0" i="0" dirty="0">
+              <a:rPr lang="ru-RU" sz="2000" b="0" i="0" dirty="0">
                 <a:solidFill>
                   <a:srgbClr val="0F1115"/>
                 </a:solidFill>
@@ -20716,7 +21311,7 @@
               <a:buAutoNum type="arabicPeriod"/>
             </a:pPr>
             <a:r>
-              <a:rPr lang="ru-RU" sz="1400" b="0" i="0" dirty="0">
+              <a:rPr lang="ru-RU" sz="2000" b="0" i="0" dirty="0">
                 <a:solidFill>
                   <a:srgbClr val="0F1115"/>
                 </a:solidFill>
@@ -20733,7 +21328,7 @@
               <a:buAutoNum type="arabicPeriod"/>
             </a:pPr>
             <a:r>
-              <a:rPr lang="ru-RU" sz="1400" b="0" i="0" dirty="0">
+              <a:rPr lang="ru-RU" sz="2000" b="0" i="0" dirty="0">
                 <a:solidFill>
                   <a:srgbClr val="0F1115"/>
                 </a:solidFill>
@@ -20744,7 +21339,7 @@
               <a:t>При встрече ) из стека берутся два числа и операция, выполняется </a:t>
             </a:r>
             <a:r>
-              <a:rPr lang="ru-RU" sz="1400" b="0" i="0" dirty="0" err="1">
+              <a:rPr lang="ru-RU" sz="2000" b="0" i="0" dirty="0" err="1">
                 <a:solidFill>
                   <a:srgbClr val="0F1115"/>
                 </a:solidFill>
@@ -20755,7 +21350,7 @@
               <a:t>min</a:t>
             </a:r>
             <a:r>
-              <a:rPr lang="ru-RU" sz="1400" b="0" i="0" dirty="0">
+              <a:rPr lang="ru-RU" sz="2000" b="0" i="0" dirty="0">
                 <a:solidFill>
                   <a:srgbClr val="0F1115"/>
                 </a:solidFill>
@@ -20766,7 +21361,7 @@
               <a:t> или </a:t>
             </a:r>
             <a:r>
-              <a:rPr lang="ru-RU" sz="1400" b="0" i="0" dirty="0" err="1">
+              <a:rPr lang="ru-RU" sz="2000" b="0" i="0" dirty="0" err="1">
                 <a:solidFill>
                   <a:srgbClr val="0F1115"/>
                 </a:solidFill>
@@ -20777,7 +21372,7 @@
               <a:t>max</a:t>
             </a:r>
             <a:r>
-              <a:rPr lang="ru-RU" sz="1400" b="0" i="0" dirty="0">
+              <a:rPr lang="ru-RU" sz="2000" b="0" i="0" dirty="0">
                 <a:solidFill>
                   <a:srgbClr val="0F1115"/>
                 </a:solidFill>
@@ -20794,7 +21389,7 @@
               <a:buAutoNum type="arabicPeriod"/>
             </a:pPr>
             <a:r>
-              <a:rPr lang="ru-RU" sz="1400" b="0" i="0" dirty="0">
+              <a:rPr lang="ru-RU" sz="2000" b="0" i="0" dirty="0">
                 <a:solidFill>
                   <a:srgbClr val="0F1115"/>
                 </a:solidFill>
@@ -20806,18 +21401,61 @@
             </a:r>
           </a:p>
           <a:p>
-            <a:pPr algn="l"/>
-            <a:r>
-              <a:rPr lang="ru-RU" sz="1400" b="0" i="0" dirty="0">
+            <a:pPr algn="l">
+              <a:buFont typeface="+mj-lt"/>
+              <a:buAutoNum type="arabicPeriod"/>
+            </a:pPr>
+            <a:r>
+              <a:rPr lang="ru-RU" sz="2000" dirty="0">
                 <a:solidFill>
                   <a:srgbClr val="0F1115"/>
                 </a:solidFill>
-                <a:effectLst/>
                 <a:latin typeface="Arial" panose="020B0604020202020204" pitchFamily="34" charset="0"/>
                 <a:cs typeface="Arial" panose="020B0604020202020204" pitchFamily="34" charset="0"/>
               </a:rPr>
-              <a:t>Сложность: O(n).</a:t>
-            </a:r>
+              <a:t>Сложность функции – О(</a:t>
+            </a:r>
+            <a:r>
+              <a:rPr lang="en-US" sz="2000" dirty="0">
+                <a:solidFill>
+                  <a:srgbClr val="0F1115"/>
+                </a:solidFill>
+                <a:latin typeface="Arial" panose="020B0604020202020204" pitchFamily="34" charset="0"/>
+                <a:cs typeface="Arial" panose="020B0604020202020204" pitchFamily="34" charset="0"/>
+              </a:rPr>
+              <a:t>n</a:t>
+            </a:r>
+            <a:r>
+              <a:rPr lang="ru-RU" sz="2000" dirty="0">
+                <a:solidFill>
+                  <a:srgbClr val="0F1115"/>
+                </a:solidFill>
+                <a:latin typeface="Arial" panose="020B0604020202020204" pitchFamily="34" charset="0"/>
+                <a:cs typeface="Arial" panose="020B0604020202020204" pitchFamily="34" charset="0"/>
+              </a:rPr>
+              <a:t>)</a:t>
+            </a:r>
+            <a:endParaRPr lang="ru-RU" sz="2000" b="0" i="0" dirty="0">
+              <a:solidFill>
+                <a:srgbClr val="0F1115"/>
+              </a:solidFill>
+              <a:effectLst/>
+              <a:latin typeface="Arial" panose="020B0604020202020204" pitchFamily="34" charset="0"/>
+              <a:cs typeface="Arial" panose="020B0604020202020204" pitchFamily="34" charset="0"/>
+            </a:endParaRPr>
+          </a:p>
+          <a:p>
+            <a:pPr marL="0" indent="0" algn="l">
+              <a:buNone/>
+            </a:pPr>
+            <a:endParaRPr lang="ru-RU" sz="1400" b="0" i="0" dirty="0">
+              <a:solidFill>
+                <a:srgbClr val="0F1115"/>
+              </a:solidFill>
+              <a:effectLst/>
+              <a:latin typeface="Arial" panose="020B0604020202020204" pitchFamily="34" charset="0"/>
+              <a:cs typeface="Arial" panose="020B0604020202020204" pitchFamily="34" charset="0"/>
+            </a:endParaRPr>
           </a:p>
         </p:txBody>
       </p:sp>
@@ -20875,6 +21513,139 @@
 </file>
 
 <file path=ppt/slides/slide6.xml><?xml version="1.0" encoding="utf-8"?>
+<p:sld xmlns:a="http://schemas.openxmlformats.org/drawingml/2006/main" xmlns:r="http://schemas.openxmlformats.org/officeDocument/2006/relationships" xmlns:p="http://schemas.openxmlformats.org/presentationml/2006/main">
+  <p:cSld>
+    <p:spTree>
+      <p:nvGrpSpPr>
+        <p:cNvPr id="1" name=""/>
+        <p:cNvGrpSpPr/>
+        <p:nvPr/>
+      </p:nvGrpSpPr>
+      <p:grpSpPr>
+        <a:xfrm>
+          <a:off x="0" y="0"/>
+          <a:ext cx="0" cy="0"/>
+          <a:chOff x="0" y="0"/>
+          <a:chExt cx="0" cy="0"/>
+        </a:xfrm>
+      </p:grpSpPr>
+      <p:sp>
+        <p:nvSpPr>
+          <p:cNvPr id="2" name="Заголовок 1">
+            <a:extLst>
+              <a:ext uri="{FF2B5EF4-FFF2-40B4-BE49-F238E27FC236}">
+                <a16:creationId xmlns:a16="http://schemas.microsoft.com/office/drawing/2014/main" id="{7998B13D-16BC-3DE7-39C3-DBEE8FBF81EB}"/>
+              </a:ext>
+            </a:extLst>
+          </p:cNvPr>
+          <p:cNvSpPr>
+            <a:spLocks noGrp="1"/>
+          </p:cNvSpPr>
+          <p:nvPr>
+            <p:ph type="title"/>
+          </p:nvPr>
+        </p:nvSpPr>
+        <p:spPr/>
+        <p:txBody>
+          <a:bodyPr/>
+          <a:lstStyle/>
+          <a:p>
+            <a:r>
+              <a:rPr lang="ru-RU" dirty="0"/>
+              <a:t>Алгоритм</a:t>
+            </a:r>
+          </a:p>
+        </p:txBody>
+      </p:sp>
+      <p:sp>
+        <p:nvSpPr>
+          <p:cNvPr id="3" name="Текст 2">
+            <a:extLst>
+              <a:ext uri="{FF2B5EF4-FFF2-40B4-BE49-F238E27FC236}">
+                <a16:creationId xmlns:a16="http://schemas.microsoft.com/office/drawing/2014/main" id="{9DC78761-98B4-F196-CD3A-E7412E81949D}"/>
+              </a:ext>
+            </a:extLst>
+          </p:cNvPr>
+          <p:cNvSpPr>
+            <a:spLocks noGrp="1"/>
+          </p:cNvSpPr>
+          <p:nvPr>
+            <p:ph type="body" idx="1"/>
+          </p:nvPr>
+        </p:nvSpPr>
+        <p:spPr>
+          <a:xfrm>
+            <a:off x="2034705" y="1938578"/>
+            <a:ext cx="10515600" cy="4229099"/>
+          </a:xfrm>
+        </p:spPr>
+        <p:txBody>
+          <a:bodyPr/>
+          <a:lstStyle/>
+          <a:p>
+            <a:pPr marL="0" indent="0">
+              <a:buNone/>
+            </a:pPr>
+            <a:r>
+              <a:rPr lang="ru-RU" dirty="0"/>
+              <a:t>Представление в виде </a:t>
+            </a:r>
+          </a:p>
+          <a:p>
+            <a:pPr marL="0" indent="0">
+              <a:buNone/>
+            </a:pPr>
+            <a:r>
+              <a:rPr lang="ru-RU" dirty="0"/>
+              <a:t>псевдокода</a:t>
+            </a:r>
+          </a:p>
+        </p:txBody>
+      </p:sp>
+      <p:pic>
+        <p:nvPicPr>
+          <p:cNvPr id="10" name="Рисунок 9">
+            <a:extLst>
+              <a:ext uri="{FF2B5EF4-FFF2-40B4-BE49-F238E27FC236}">
+                <a16:creationId xmlns:a16="http://schemas.microsoft.com/office/drawing/2014/main" id="{1EC092E4-A28C-A676-725C-D7FC2E90DA82}"/>
+              </a:ext>
+            </a:extLst>
+          </p:cNvPr>
+          <p:cNvPicPr>
+            <a:picLocks noChangeAspect="1"/>
+          </p:cNvPicPr>
+          <p:nvPr/>
+        </p:nvPicPr>
+        <p:blipFill>
+          <a:blip r:embed="rId2"/>
+          <a:stretch>
+            <a:fillRect/>
+          </a:stretch>
+        </p:blipFill>
+        <p:spPr>
+          <a:xfrm>
+            <a:off x="6096000" y="1938578"/>
+            <a:ext cx="2643466" cy="4641842"/>
+          </a:xfrm>
+          <a:prstGeom prst="rect">
+            <a:avLst/>
+          </a:prstGeom>
+        </p:spPr>
+      </p:pic>
+    </p:spTree>
+    <p:extLst>
+      <p:ext uri="{BB962C8B-B14F-4D97-AF65-F5344CB8AC3E}">
+        <p14:creationId xmlns:p14="http://schemas.microsoft.com/office/powerpoint/2010/main" val="1827832951"/>
+      </p:ext>
+    </p:extLst>
+  </p:cSld>
+  <p:clrMapOvr>
+    <a:masterClrMapping/>
+  </p:clrMapOvr>
+</p:sld>
+</file>
+
+<file path=ppt/slides/slide7.xml><?xml version="1.0" encoding="utf-8"?>
 <p:sld xmlns:a="http://schemas.openxmlformats.org/drawingml/2006/main" xmlns:r="http://schemas.openxmlformats.org/officeDocument/2006/relationships" xmlns:p="http://schemas.openxmlformats.org/presentationml/2006/main">
   <p:cSld name="Slide12">
     <p:spTree>
@@ -20996,7 +21767,7 @@
 </p:sld>
 </file>
 
-<file path=ppt/slides/slide7.xml><?xml version="1.0" encoding="utf-8"?>
+<file path=ppt/slides/slide8.xml><?xml version="1.0" encoding="utf-8"?>
 <p:sld xmlns:a="http://schemas.openxmlformats.org/drawingml/2006/main" xmlns:r="http://schemas.openxmlformats.org/officeDocument/2006/relationships" xmlns:p="http://schemas.openxmlformats.org/presentationml/2006/main">
   <p:cSld name="Slide13">
     <p:spTree>
@@ -21042,7 +21813,7 @@
             <a:pPr lvl="0"/>
             <a:r>
               <a:rPr lang="ru-RU" sz="4000" dirty="0"/>
-              <a:t>Тесты</a:t>
+              <a:t>Пример работы</a:t>
             </a:r>
           </a:p>
         </p:txBody>
@@ -21085,7 +21856,7 @@
 </p:sld>
 </file>
 
-<file path=ppt/slides/slide8.xml><?xml version="1.0" encoding="utf-8"?>
+<file path=ppt/slides/slide9.xml><?xml version="1.0" encoding="utf-8"?>
 <p:sld xmlns:a="http://schemas.openxmlformats.org/drawingml/2006/main" xmlns:r="http://schemas.openxmlformats.org/officeDocument/2006/relationships" xmlns:p="http://schemas.openxmlformats.org/presentationml/2006/main">
   <p:cSld name="Slide15">
     <p:spTree>
@@ -21136,10 +21907,12 @@
             <a:r>
               <a:rPr lang="ru-RU" sz="4000" dirty="0">
                 <a:solidFill>
-                  <a:srgbClr val="FFFFFF"/>
-                </a:solidFill>
+                  <a:schemeClr val="bg1"/>
+                </a:solidFill>
+                <a:latin typeface="Arial" panose="020B0604020202020204" pitchFamily="34" charset="0"/>
+                <a:cs typeface="Arial" panose="020B0604020202020204" pitchFamily="34" charset="0"/>
               </a:rPr>
-              <a:t>Тесты</a:t>
+              <a:t>Пример работы</a:t>
             </a:r>
           </a:p>
         </p:txBody>
@@ -21198,144 +21971,6 @@
           <a:xfrm>
             <a:off x="6994271" y="2148276"/>
             <a:ext cx="3639058" cy="2076740"/>
-          </a:xfrm>
-          <a:prstGeom prst="rect">
-            <a:avLst/>
-          </a:prstGeom>
-        </p:spPr>
-      </p:pic>
-    </p:spTree>
-  </p:cSld>
-  <p:clrMapOvr>
-    <a:masterClrMapping/>
-  </p:clrMapOvr>
-</p:sld>
-</file>
-
-<file path=ppt/slides/slide9.xml><?xml version="1.0" encoding="utf-8"?>
-<p:sld xmlns:a="http://schemas.openxmlformats.org/drawingml/2006/main" xmlns:r="http://schemas.openxmlformats.org/officeDocument/2006/relationships" xmlns:p="http://schemas.openxmlformats.org/presentationml/2006/main">
-  <p:cSld name="Slide16">
-    <p:spTree>
-      <p:nvGrpSpPr>
-        <p:cNvPr id="1" name=""/>
-        <p:cNvGrpSpPr/>
-        <p:nvPr/>
-      </p:nvGrpSpPr>
-      <p:grpSpPr>
-        <a:xfrm>
-          <a:off x="0" y="0"/>
-          <a:ext cx="0" cy="0"/>
-          <a:chOff x="0" y="0"/>
-          <a:chExt cx="0" cy="0"/>
-        </a:xfrm>
-      </p:grpSpPr>
-      <p:sp>
-        <p:nvSpPr>
-          <p:cNvPr id="2" name="Объект 1">
-            <a:extLst>
-              <a:ext uri="{FF2B5EF4-FFF2-40B4-BE49-F238E27FC236}">
-                <a16:creationId xmlns:a16="http://schemas.microsoft.com/office/drawing/2014/main" id="{E8011DC5-2FB5-DE89-3BD3-F1B6ECB4AF2D}"/>
-              </a:ext>
-            </a:extLst>
-          </p:cNvPr>
-          <p:cNvSpPr txBox="1">
-            <a:spLocks noGrp="1"/>
-          </p:cNvSpPr>
-          <p:nvPr>
-            <p:ph idx="1"/>
-          </p:nvPr>
-        </p:nvSpPr>
-        <p:spPr>
-          <a:xfrm>
-            <a:off x="838200" y="690602"/>
-            <a:ext cx="10515600" cy="1265035"/>
-          </a:xfrm>
-        </p:spPr>
-        <p:txBody>
-          <a:bodyPr/>
-          <a:lstStyle/>
-          <a:p>
-            <a:pPr marL="0" lvl="0" indent="0">
-              <a:lnSpc>
-                <a:spcPct val="90000"/>
-              </a:lnSpc>
-              <a:buNone/>
-            </a:pPr>
-            <a:r>
-              <a:rPr lang="ru-RU" sz="4000" dirty="0">
-                <a:solidFill>
-                  <a:srgbClr val="FFFFFF"/>
-                </a:solidFill>
-                <a:latin typeface="Arial" panose="020B0604020202020204" pitchFamily="34" charset="0"/>
-                <a:cs typeface="Arial" panose="020B0604020202020204" pitchFamily="34" charset="0"/>
-              </a:rPr>
-              <a:t>Тесты</a:t>
-            </a:r>
-          </a:p>
-          <a:p>
-            <a:pPr lvl="0">
-              <a:lnSpc>
-                <a:spcPct val="90000"/>
-              </a:lnSpc>
-            </a:pPr>
-            <a:endParaRPr lang="ru-RU" dirty="0"/>
-          </a:p>
-        </p:txBody>
-      </p:sp>
-      <p:pic>
-        <p:nvPicPr>
-          <p:cNvPr id="13" name="Рисунок 12">
-            <a:extLst>
-              <a:ext uri="{FF2B5EF4-FFF2-40B4-BE49-F238E27FC236}">
-                <a16:creationId xmlns:a16="http://schemas.microsoft.com/office/drawing/2014/main" id="{174E5917-1477-8325-BC36-BE65EEC9F4DE}"/>
-              </a:ext>
-            </a:extLst>
-          </p:cNvPr>
-          <p:cNvPicPr>
-            <a:picLocks noChangeAspect="1"/>
-          </p:cNvPicPr>
-          <p:nvPr/>
-        </p:nvPicPr>
-        <p:blipFill>
-          <a:blip r:embed="rId3"/>
-          <a:stretch>
-            <a:fillRect/>
-          </a:stretch>
-        </p:blipFill>
-        <p:spPr>
-          <a:xfrm>
-            <a:off x="1070740" y="1955637"/>
-            <a:ext cx="4191585" cy="2095792"/>
-          </a:xfrm>
-          <a:prstGeom prst="rect">
-            <a:avLst/>
-          </a:prstGeom>
-        </p:spPr>
-      </p:pic>
-      <p:pic>
-        <p:nvPicPr>
-          <p:cNvPr id="15" name="Рисунок 14">
-            <a:extLst>
-              <a:ext uri="{FF2B5EF4-FFF2-40B4-BE49-F238E27FC236}">
-                <a16:creationId xmlns:a16="http://schemas.microsoft.com/office/drawing/2014/main" id="{9F2264A0-DF30-F6B2-4543-D9E180AA3DF1}"/>
-              </a:ext>
-            </a:extLst>
-          </p:cNvPr>
-          <p:cNvPicPr>
-            <a:picLocks noChangeAspect="1"/>
-          </p:cNvPicPr>
-          <p:nvPr/>
-        </p:nvPicPr>
-        <p:blipFill>
-          <a:blip r:embed="rId4"/>
-          <a:stretch>
-            <a:fillRect/>
-          </a:stretch>
-        </p:blipFill>
-        <p:spPr>
-          <a:xfrm>
-            <a:off x="6389915" y="1955637"/>
-            <a:ext cx="4305901" cy="2162477"/>
           </a:xfrm>
           <a:prstGeom prst="rect">
             <a:avLst/>
